--- a/PPT Ekstraksi Fitur Tekstur.pptx
+++ b/PPT Ekstraksi Fitur Tekstur.pptx
@@ -8176,7 +8176,7 @@
             <a:pPr marL="0" lvl="0" indent="0" algn="l"/>
             <a:r>
               <a:rPr lang="en-US" b="1" dirty="0"/>
-              <a:t>Mukhammad Arya Putra ( 2318034 )</a:t>
+              <a:t>Mukhammad Arya Putra</a:t>
             </a:r>
             <a:endParaRPr b="1" dirty="0"/>
           </a:p>
@@ -8231,7 +8231,7 @@
         </p:nvSpPr>
         <p:spPr>
           <a:xfrm>
-            <a:off x="720000" y="445025"/>
+            <a:off x="982662" y="625020"/>
             <a:ext cx="7704000" cy="572700"/>
           </a:xfrm>
           <a:prstGeom prst="rect">
@@ -9938,7 +9938,7 @@
           <p:nvPr>
             <p:extLst>
               <p:ext uri="{D42A27DB-BD31-4B8C-83A1-F6EECF244321}">
-                <p14:modId xmlns:p14="http://schemas.microsoft.com/office/powerpoint/2010/main" val="3632544184"/>
+                <p14:modId xmlns:p14="http://schemas.microsoft.com/office/powerpoint/2010/main" val="1777268084"/>
               </p:ext>
             </p:extLst>
           </p:nvPr>
@@ -14787,7 +14787,7 @@
         </p:nvSpPr>
         <p:spPr>
           <a:xfrm>
-            <a:off x="965954" y="619330"/>
+            <a:off x="965954" y="448203"/>
             <a:ext cx="7704000" cy="572700"/>
           </a:xfrm>
           <a:prstGeom prst="rect">
@@ -15342,54 +15342,6 @@
       </p:grpSpPr>
       <p:sp>
         <p:nvSpPr>
-          <p:cNvPr id="395" name="Google Shape;395;p36">
-            <a:extLst>
-              <a:ext uri="{FF2B5EF4-FFF2-40B4-BE49-F238E27FC236}">
-                <a16:creationId xmlns:a16="http://schemas.microsoft.com/office/drawing/2014/main" id="{6744B43B-1F3C-A95E-0D42-05AE800D71B8}"/>
-              </a:ext>
-            </a:extLst>
-          </p:cNvPr>
-          <p:cNvSpPr txBox="1">
-            <a:spLocks noGrp="1"/>
-          </p:cNvSpPr>
-          <p:nvPr>
-            <p:ph type="title"/>
-          </p:nvPr>
-        </p:nvSpPr>
-        <p:spPr>
-          <a:xfrm>
-            <a:off x="965954" y="619330"/>
-            <a:ext cx="7704000" cy="572700"/>
-          </a:xfrm>
-          <a:prstGeom prst="rect">
-            <a:avLst/>
-          </a:prstGeom>
-        </p:spPr>
-        <p:txBody>
-          <a:bodyPr spcFirstLastPara="1" wrap="square" lIns="91425" tIns="91425" rIns="91425" bIns="91425" anchor="t" anchorCtr="0">
-            <a:noAutofit/>
-          </a:bodyPr>
-          <a:lstStyle/>
-          <a:p>
-            <a:pPr marL="0" lvl="0" indent="0" algn="l" rtl="0">
-              <a:spcBef>
-                <a:spcPts val="0"/>
-              </a:spcBef>
-              <a:spcAft>
-                <a:spcPts val="0"/>
-              </a:spcAft>
-              <a:buNone/>
-            </a:pPr>
-            <a:r>
-              <a:rPr lang="en-US" dirty="0" err="1"/>
-              <a:t>Tahapan</a:t>
-            </a:r>
-            <a:endParaRPr dirty="0"/>
-          </a:p>
-        </p:txBody>
-      </p:sp>
-      <p:sp>
-        <p:nvSpPr>
           <p:cNvPr id="13" name="Rectangle 2">
             <a:extLst>
               <a:ext uri="{FF2B5EF4-FFF2-40B4-BE49-F238E27FC236}">
@@ -15406,7 +15358,7 @@
         </p:nvSpPr>
         <p:spPr bwMode="auto">
           <a:xfrm>
-            <a:off x="965954" y="995664"/>
+            <a:off x="869069" y="549331"/>
             <a:ext cx="8195909" cy="1200329"/>
           </a:xfrm>
           <a:prstGeom prst="rect">
@@ -15523,7 +15475,7 @@
         </p:blipFill>
         <p:spPr>
           <a:xfrm>
-            <a:off x="1544157" y="1575716"/>
+            <a:off x="1476356" y="1835760"/>
             <a:ext cx="7105455" cy="2838240"/>
           </a:xfrm>
           <a:prstGeom prst="rect">
@@ -15531,6 +15483,564 @@
           </a:prstGeom>
         </p:spPr>
       </p:pic>
+      <p:sp>
+        <p:nvSpPr>
+          <p:cNvPr id="3" name="Rectangle 2">
+            <a:extLst>
+              <a:ext uri="{FF2B5EF4-FFF2-40B4-BE49-F238E27FC236}">
+                <a16:creationId xmlns:a16="http://schemas.microsoft.com/office/drawing/2014/main" id="{F6ADD0C8-D1FB-E2DC-EEC3-F82907BE59FF}"/>
+              </a:ext>
+            </a:extLst>
+          </p:cNvPr>
+          <p:cNvSpPr txBox="1">
+            <a:spLocks noChangeArrowheads="1"/>
+          </p:cNvSpPr>
+          <p:nvPr/>
+        </p:nvSpPr>
+        <p:spPr bwMode="auto">
+          <a:xfrm>
+            <a:off x="1476356" y="1103329"/>
+            <a:ext cx="7588622" cy="646331"/>
+          </a:xfrm>
+          <a:prstGeom prst="rect">
+            <a:avLst/>
+          </a:prstGeom>
+          <a:noFill/>
+          <a:ln>
+            <a:noFill/>
+          </a:ln>
+          <a:effectLst/>
+          <a:extLst>
+            <a:ext uri="{909E8E84-426E-40DD-AFC4-6F175D3DCCD1}">
+              <a14:hiddenFill xmlns:a14="http://schemas.microsoft.com/office/drawing/2010/main">
+                <a:solidFill>
+                  <a:schemeClr val="accent1"/>
+                </a:solidFill>
+              </a14:hiddenFill>
+            </a:ext>
+            <a:ext uri="{91240B29-F687-4F45-9708-019B960494DF}">
+              <a14:hiddenLine xmlns:a14="http://schemas.microsoft.com/office/drawing/2010/main" w="9525">
+                <a:solidFill>
+                  <a:schemeClr val="tx1"/>
+                </a:solidFill>
+                <a:miter lim="800000"/>
+                <a:headEnd/>
+                <a:tailEnd/>
+              </a14:hiddenLine>
+            </a:ext>
+            <a:ext uri="{AF507438-7753-43E0-B8FC-AC1667EBCBE1}">
+              <a14:hiddenEffects xmlns:a14="http://schemas.microsoft.com/office/drawing/2010/main">
+                <a:effectLst>
+                  <a:outerShdw dist="35921" dir="2700000" algn="ctr" rotWithShape="0">
+                    <a:schemeClr val="bg2"/>
+                  </a:outerShdw>
+                </a:effectLst>
+              </a14:hiddenEffects>
+            </a:ext>
+          </a:extLst>
+        </p:spPr>
+        <p:txBody>
+          <a:bodyPr spcFirstLastPara="1" vert="horz" wrap="square" lIns="91440" tIns="45720" rIns="91440" bIns="45720" numCol="1" anchor="ctr" anchorCtr="0" compatLnSpc="1">
+            <a:prstTxWarp prst="textNoShape">
+              <a:avLst/>
+            </a:prstTxWarp>
+            <a:spAutoFit/>
+          </a:bodyPr>
+          <a:lstStyle>
+            <a:defPPr marR="0" lvl="0" algn="l" rtl="0">
+              <a:lnSpc>
+                <a:spcPct val="100000"/>
+              </a:lnSpc>
+              <a:spcBef>
+                <a:spcPts val="0"/>
+              </a:spcBef>
+              <a:spcAft>
+                <a:spcPts val="0"/>
+              </a:spcAft>
+            </a:defPPr>
+            <a:lvl1pPr marL="457200" marR="0" lvl="0" indent="-304800" algn="l" rtl="0">
+              <a:lnSpc>
+                <a:spcPct val="100000"/>
+              </a:lnSpc>
+              <a:spcBef>
+                <a:spcPts val="0"/>
+              </a:spcBef>
+              <a:spcAft>
+                <a:spcPts val="0"/>
+              </a:spcAft>
+              <a:buClr>
+                <a:schemeClr val="dk1"/>
+              </a:buClr>
+              <a:buSzPts val="1200"/>
+              <a:buFont typeface="Arimo"/>
+              <a:buNone/>
+              <a:defRPr sz="1200" b="0" i="0" u="none" strike="noStrike" cap="none">
+                <a:solidFill>
+                  <a:schemeClr val="dk1"/>
+                </a:solidFill>
+                <a:latin typeface="Arimo"/>
+                <a:ea typeface="Arimo"/>
+                <a:cs typeface="Arimo"/>
+                <a:sym typeface="Arimo"/>
+              </a:defRPr>
+            </a:lvl1pPr>
+            <a:lvl2pPr marL="914400" marR="0" lvl="1" indent="-304800" algn="ctr" rtl="0">
+              <a:lnSpc>
+                <a:spcPct val="100000"/>
+              </a:lnSpc>
+              <a:spcBef>
+                <a:spcPts val="0"/>
+              </a:spcBef>
+              <a:spcAft>
+                <a:spcPts val="0"/>
+              </a:spcAft>
+              <a:buClr>
+                <a:schemeClr val="dk1"/>
+              </a:buClr>
+              <a:buSzPts val="1200"/>
+              <a:buFont typeface="Arimo"/>
+              <a:buNone/>
+              <a:defRPr sz="1200" b="0" i="0" u="none" strike="noStrike" cap="none">
+                <a:solidFill>
+                  <a:schemeClr val="dk1"/>
+                </a:solidFill>
+                <a:latin typeface="Arimo"/>
+                <a:ea typeface="Arimo"/>
+                <a:cs typeface="Arimo"/>
+                <a:sym typeface="Arimo"/>
+              </a:defRPr>
+            </a:lvl2pPr>
+            <a:lvl3pPr marL="1371600" marR="0" lvl="2" indent="-304800" algn="ctr" rtl="0">
+              <a:lnSpc>
+                <a:spcPct val="100000"/>
+              </a:lnSpc>
+              <a:spcBef>
+                <a:spcPts val="0"/>
+              </a:spcBef>
+              <a:spcAft>
+                <a:spcPts val="0"/>
+              </a:spcAft>
+              <a:buClr>
+                <a:schemeClr val="dk1"/>
+              </a:buClr>
+              <a:buSzPts val="1200"/>
+              <a:buFont typeface="Arimo"/>
+              <a:buNone/>
+              <a:defRPr sz="1200" b="0" i="0" u="none" strike="noStrike" cap="none">
+                <a:solidFill>
+                  <a:schemeClr val="dk1"/>
+                </a:solidFill>
+                <a:latin typeface="Arimo"/>
+                <a:ea typeface="Arimo"/>
+                <a:cs typeface="Arimo"/>
+                <a:sym typeface="Arimo"/>
+              </a:defRPr>
+            </a:lvl3pPr>
+            <a:lvl4pPr marL="1828800" marR="0" lvl="3" indent="-304800" algn="ctr" rtl="0">
+              <a:lnSpc>
+                <a:spcPct val="100000"/>
+              </a:lnSpc>
+              <a:spcBef>
+                <a:spcPts val="0"/>
+              </a:spcBef>
+              <a:spcAft>
+                <a:spcPts val="0"/>
+              </a:spcAft>
+              <a:buClr>
+                <a:schemeClr val="dk1"/>
+              </a:buClr>
+              <a:buSzPts val="1200"/>
+              <a:buFont typeface="Arimo"/>
+              <a:buNone/>
+              <a:defRPr sz="1200" b="0" i="0" u="none" strike="noStrike" cap="none">
+                <a:solidFill>
+                  <a:schemeClr val="dk1"/>
+                </a:solidFill>
+                <a:latin typeface="Arimo"/>
+                <a:ea typeface="Arimo"/>
+                <a:cs typeface="Arimo"/>
+                <a:sym typeface="Arimo"/>
+              </a:defRPr>
+            </a:lvl4pPr>
+            <a:lvl5pPr marL="2286000" marR="0" lvl="4" indent="-304800" algn="ctr" rtl="0">
+              <a:lnSpc>
+                <a:spcPct val="100000"/>
+              </a:lnSpc>
+              <a:spcBef>
+                <a:spcPts val="0"/>
+              </a:spcBef>
+              <a:spcAft>
+                <a:spcPts val="0"/>
+              </a:spcAft>
+              <a:buClr>
+                <a:schemeClr val="dk1"/>
+              </a:buClr>
+              <a:buSzPts val="1200"/>
+              <a:buFont typeface="Arimo"/>
+              <a:buNone/>
+              <a:defRPr sz="1200" b="0" i="0" u="none" strike="noStrike" cap="none">
+                <a:solidFill>
+                  <a:schemeClr val="dk1"/>
+                </a:solidFill>
+                <a:latin typeface="Arimo"/>
+                <a:ea typeface="Arimo"/>
+                <a:cs typeface="Arimo"/>
+                <a:sym typeface="Arimo"/>
+              </a:defRPr>
+            </a:lvl5pPr>
+            <a:lvl6pPr marL="2743200" marR="0" lvl="5" indent="-304800" algn="ctr" rtl="0">
+              <a:lnSpc>
+                <a:spcPct val="100000"/>
+              </a:lnSpc>
+              <a:spcBef>
+                <a:spcPts val="0"/>
+              </a:spcBef>
+              <a:spcAft>
+                <a:spcPts val="0"/>
+              </a:spcAft>
+              <a:buClr>
+                <a:schemeClr val="dk1"/>
+              </a:buClr>
+              <a:buSzPts val="1200"/>
+              <a:buFont typeface="Arimo"/>
+              <a:buNone/>
+              <a:defRPr sz="1200" b="0" i="0" u="none" strike="noStrike" cap="none">
+                <a:solidFill>
+                  <a:schemeClr val="dk1"/>
+                </a:solidFill>
+                <a:latin typeface="Arimo"/>
+                <a:ea typeface="Arimo"/>
+                <a:cs typeface="Arimo"/>
+                <a:sym typeface="Arimo"/>
+              </a:defRPr>
+            </a:lvl6pPr>
+            <a:lvl7pPr marL="3200400" marR="0" lvl="6" indent="-304800" algn="ctr" rtl="0">
+              <a:lnSpc>
+                <a:spcPct val="100000"/>
+              </a:lnSpc>
+              <a:spcBef>
+                <a:spcPts val="0"/>
+              </a:spcBef>
+              <a:spcAft>
+                <a:spcPts val="0"/>
+              </a:spcAft>
+              <a:buClr>
+                <a:schemeClr val="dk1"/>
+              </a:buClr>
+              <a:buSzPts val="1200"/>
+              <a:buFont typeface="Arimo"/>
+              <a:buNone/>
+              <a:defRPr sz="1200" b="0" i="0" u="none" strike="noStrike" cap="none">
+                <a:solidFill>
+                  <a:schemeClr val="dk1"/>
+                </a:solidFill>
+                <a:latin typeface="Arimo"/>
+                <a:ea typeface="Arimo"/>
+                <a:cs typeface="Arimo"/>
+                <a:sym typeface="Arimo"/>
+              </a:defRPr>
+            </a:lvl7pPr>
+            <a:lvl8pPr marL="3657600" marR="0" lvl="7" indent="-304800" algn="ctr" rtl="0">
+              <a:lnSpc>
+                <a:spcPct val="100000"/>
+              </a:lnSpc>
+              <a:spcBef>
+                <a:spcPts val="0"/>
+              </a:spcBef>
+              <a:spcAft>
+                <a:spcPts val="0"/>
+              </a:spcAft>
+              <a:buClr>
+                <a:schemeClr val="dk1"/>
+              </a:buClr>
+              <a:buSzPts val="1200"/>
+              <a:buFont typeface="Arimo"/>
+              <a:buNone/>
+              <a:defRPr sz="1200" b="0" i="0" u="none" strike="noStrike" cap="none">
+                <a:solidFill>
+                  <a:schemeClr val="dk1"/>
+                </a:solidFill>
+                <a:latin typeface="Arimo"/>
+                <a:ea typeface="Arimo"/>
+                <a:cs typeface="Arimo"/>
+                <a:sym typeface="Arimo"/>
+              </a:defRPr>
+            </a:lvl8pPr>
+            <a:lvl9pPr marL="4114800" marR="0" lvl="8" indent="-304800" algn="ctr" rtl="0">
+              <a:lnSpc>
+                <a:spcPct val="100000"/>
+              </a:lnSpc>
+              <a:spcBef>
+                <a:spcPts val="0"/>
+              </a:spcBef>
+              <a:spcAft>
+                <a:spcPts val="0"/>
+              </a:spcAft>
+              <a:buClr>
+                <a:schemeClr val="dk1"/>
+              </a:buClr>
+              <a:buSzPts val="1200"/>
+              <a:buFont typeface="Arimo"/>
+              <a:buNone/>
+              <a:defRPr sz="1200" b="0" i="0" u="none" strike="noStrike" cap="none">
+                <a:solidFill>
+                  <a:schemeClr val="dk1"/>
+                </a:solidFill>
+                <a:latin typeface="Arimo"/>
+                <a:ea typeface="Arimo"/>
+                <a:cs typeface="Arimo"/>
+                <a:sym typeface="Arimo"/>
+              </a:defRPr>
+            </a:lvl9pPr>
+          </a:lstStyle>
+          <a:p>
+            <a:pPr marL="0" indent="0" eaLnBrk="0" fontAlgn="base" hangingPunct="0">
+              <a:spcBef>
+                <a:spcPct val="0"/>
+              </a:spcBef>
+              <a:spcAft>
+                <a:spcPct val="0"/>
+              </a:spcAft>
+              <a:buClrTx/>
+              <a:buSzTx/>
+            </a:pPr>
+            <a:r>
+              <a:rPr lang="en-ID" dirty="0"/>
+              <a:t>Proses </a:t>
+            </a:r>
+            <a:r>
+              <a:rPr lang="en-ID" dirty="0" err="1"/>
+              <a:t>ini</a:t>
+            </a:r>
+            <a:r>
+              <a:rPr lang="en-ID" dirty="0"/>
+              <a:t> </a:t>
+            </a:r>
+            <a:r>
+              <a:rPr lang="en-ID" dirty="0" err="1"/>
+              <a:t>bertujuan</a:t>
+            </a:r>
+            <a:r>
+              <a:rPr lang="en-ID" dirty="0"/>
+              <a:t> </a:t>
+            </a:r>
+            <a:r>
+              <a:rPr lang="en-ID" dirty="0" err="1"/>
+              <a:t>untuk</a:t>
+            </a:r>
+            <a:r>
+              <a:rPr lang="en-ID" dirty="0"/>
+              <a:t> </a:t>
+            </a:r>
+            <a:r>
+              <a:rPr lang="en-ID" dirty="0" err="1"/>
+              <a:t>mengurangi</a:t>
+            </a:r>
+            <a:r>
+              <a:rPr lang="en-ID" dirty="0"/>
+              <a:t> </a:t>
+            </a:r>
+            <a:r>
+              <a:rPr lang="en-ID" dirty="0" err="1"/>
+              <a:t>kompleksitas</a:t>
+            </a:r>
+            <a:r>
+              <a:rPr lang="en-ID" dirty="0"/>
+              <a:t> data </a:t>
+            </a:r>
+            <a:r>
+              <a:rPr lang="en-ID" dirty="0" err="1"/>
+              <a:t>sehingga</a:t>
+            </a:r>
+            <a:r>
+              <a:rPr lang="en-ID" dirty="0"/>
+              <a:t> </a:t>
+            </a:r>
+            <a:r>
+              <a:rPr lang="en-ID" dirty="0" err="1"/>
+              <a:t>pengolahan</a:t>
+            </a:r>
+            <a:r>
+              <a:rPr lang="en-ID" dirty="0"/>
+              <a:t> </a:t>
+            </a:r>
+            <a:r>
+              <a:rPr lang="en-ID" dirty="0" err="1"/>
+              <a:t>citra</a:t>
+            </a:r>
+            <a:r>
+              <a:rPr lang="en-ID" dirty="0"/>
+              <a:t> </a:t>
+            </a:r>
+            <a:r>
+              <a:rPr lang="en-ID" dirty="0" err="1"/>
+              <a:t>menjadi</a:t>
+            </a:r>
+            <a:r>
+              <a:rPr lang="en-ID" dirty="0"/>
+              <a:t> </a:t>
+            </a:r>
+            <a:r>
+              <a:rPr lang="en-ID" dirty="0" err="1"/>
+              <a:t>lebih</a:t>
+            </a:r>
+            <a:r>
+              <a:rPr lang="en-ID" dirty="0"/>
+              <a:t> </a:t>
+            </a:r>
+            <a:r>
+              <a:rPr lang="en-ID" dirty="0" err="1"/>
+              <a:t>cepat</a:t>
+            </a:r>
+            <a:r>
+              <a:rPr lang="en-ID" dirty="0"/>
+              <a:t> dan </a:t>
+            </a:r>
+            <a:r>
+              <a:rPr lang="en-ID" dirty="0" err="1"/>
+              <a:t>efisien</a:t>
+            </a:r>
+            <a:r>
+              <a:rPr lang="en-ID" dirty="0"/>
+              <a:t>. Selain </a:t>
+            </a:r>
+            <a:r>
+              <a:rPr lang="en-ID" dirty="0" err="1"/>
+              <a:t>itu</a:t>
+            </a:r>
+            <a:r>
+              <a:rPr lang="en-ID" dirty="0"/>
+              <a:t>, </a:t>
+            </a:r>
+            <a:r>
+              <a:rPr lang="en-ID" dirty="0" err="1"/>
+              <a:t>informasi</a:t>
+            </a:r>
+            <a:r>
+              <a:rPr lang="en-ID" dirty="0"/>
+              <a:t> </a:t>
+            </a:r>
+            <a:r>
+              <a:rPr lang="en-ID" dirty="0" err="1"/>
+              <a:t>penting</a:t>
+            </a:r>
+            <a:r>
+              <a:rPr lang="en-ID" dirty="0"/>
+              <a:t> </a:t>
+            </a:r>
+            <a:r>
+              <a:rPr lang="en-ID" dirty="0" err="1"/>
+              <a:t>seperti</a:t>
+            </a:r>
+            <a:r>
+              <a:rPr lang="en-ID" dirty="0"/>
+              <a:t> </a:t>
+            </a:r>
+            <a:r>
+              <a:rPr lang="en-ID" dirty="0" err="1"/>
+              <a:t>pola</a:t>
+            </a:r>
+            <a:r>
+              <a:rPr lang="en-ID" dirty="0"/>
+              <a:t> dan </a:t>
+            </a:r>
+            <a:r>
+              <a:rPr lang="en-ID" dirty="0" err="1"/>
+              <a:t>tekstur</a:t>
+            </a:r>
+            <a:r>
+              <a:rPr lang="en-ID" dirty="0"/>
+              <a:t> </a:t>
+            </a:r>
+            <a:r>
+              <a:rPr lang="en-ID" dirty="0" err="1"/>
+              <a:t>tetap</a:t>
+            </a:r>
+            <a:r>
+              <a:rPr lang="en-ID" dirty="0"/>
+              <a:t> </a:t>
+            </a:r>
+            <a:r>
+              <a:rPr lang="en-ID" dirty="0" err="1"/>
+              <a:t>dipertahankan</a:t>
+            </a:r>
+            <a:r>
+              <a:rPr lang="en-ID" dirty="0"/>
+              <a:t>, </a:t>
+            </a:r>
+            <a:r>
+              <a:rPr lang="en-ID" dirty="0" err="1"/>
+              <a:t>sehingga</a:t>
+            </a:r>
+            <a:r>
+              <a:rPr lang="en-ID" dirty="0"/>
+              <a:t> </a:t>
+            </a:r>
+            <a:r>
+              <a:rPr lang="en-ID" dirty="0" err="1"/>
+              <a:t>cocok</a:t>
+            </a:r>
+            <a:r>
+              <a:rPr lang="en-ID" dirty="0"/>
+              <a:t> </a:t>
+            </a:r>
+            <a:r>
+              <a:rPr lang="en-ID" dirty="0" err="1"/>
+              <a:t>digunakan</a:t>
+            </a:r>
+            <a:r>
+              <a:rPr lang="en-ID" dirty="0"/>
+              <a:t> </a:t>
+            </a:r>
+            <a:r>
+              <a:rPr lang="en-ID" dirty="0" err="1"/>
+              <a:t>untuk</a:t>
+            </a:r>
+            <a:r>
+              <a:rPr lang="en-ID" dirty="0"/>
+              <a:t> </a:t>
+            </a:r>
+            <a:r>
+              <a:rPr lang="en-ID" dirty="0" err="1"/>
+              <a:t>tahap</a:t>
+            </a:r>
+            <a:r>
+              <a:rPr lang="en-ID" dirty="0"/>
+              <a:t> </a:t>
+            </a:r>
+            <a:r>
+              <a:rPr lang="en-ID" dirty="0" err="1"/>
+              <a:t>ekstraksi</a:t>
+            </a:r>
+            <a:r>
+              <a:rPr lang="en-ID" dirty="0"/>
+              <a:t> </a:t>
+            </a:r>
+            <a:r>
+              <a:rPr lang="en-ID" dirty="0" err="1"/>
+              <a:t>fitur</a:t>
+            </a:r>
+            <a:r>
+              <a:rPr lang="en-ID" dirty="0"/>
+              <a:t> </a:t>
+            </a:r>
+            <a:r>
+              <a:rPr lang="en-ID" dirty="0" err="1"/>
+              <a:t>seperti</a:t>
+            </a:r>
+            <a:r>
+              <a:rPr lang="en-ID" dirty="0"/>
+              <a:t> GLCM.</a:t>
+            </a:r>
+            <a:endParaRPr lang="en-US" altLang="en-US" dirty="0">
+              <a:solidFill>
+                <a:schemeClr val="tx1"/>
+              </a:solidFill>
+              <a:latin typeface="Arial" panose="020B0604020202020204" pitchFamily="34" charset="0"/>
+            </a:endParaRPr>
+          </a:p>
+        </p:txBody>
+      </p:sp>
     </p:spTree>
     <p:extLst>
       <p:ext uri="{BB962C8B-B14F-4D97-AF65-F5344CB8AC3E}">
@@ -15569,54 +16079,6 @@
       </p:grpSpPr>
       <p:sp>
         <p:nvSpPr>
-          <p:cNvPr id="395" name="Google Shape;395;p36">
-            <a:extLst>
-              <a:ext uri="{FF2B5EF4-FFF2-40B4-BE49-F238E27FC236}">
-                <a16:creationId xmlns:a16="http://schemas.microsoft.com/office/drawing/2014/main" id="{03EAB0E7-192D-2263-FCA7-46ECF9587759}"/>
-              </a:ext>
-            </a:extLst>
-          </p:cNvPr>
-          <p:cNvSpPr txBox="1">
-            <a:spLocks noGrp="1"/>
-          </p:cNvSpPr>
-          <p:nvPr>
-            <p:ph type="title"/>
-          </p:nvPr>
-        </p:nvSpPr>
-        <p:spPr>
-          <a:xfrm>
-            <a:off x="965954" y="619330"/>
-            <a:ext cx="7704000" cy="572700"/>
-          </a:xfrm>
-          <a:prstGeom prst="rect">
-            <a:avLst/>
-          </a:prstGeom>
-        </p:spPr>
-        <p:txBody>
-          <a:bodyPr spcFirstLastPara="1" wrap="square" lIns="91425" tIns="91425" rIns="91425" bIns="91425" anchor="t" anchorCtr="0">
-            <a:noAutofit/>
-          </a:bodyPr>
-          <a:lstStyle/>
-          <a:p>
-            <a:pPr marL="0" lvl="0" indent="0" algn="l" rtl="0">
-              <a:spcBef>
-                <a:spcPts val="0"/>
-              </a:spcBef>
-              <a:spcAft>
-                <a:spcPts val="0"/>
-              </a:spcAft>
-              <a:buNone/>
-            </a:pPr>
-            <a:r>
-              <a:rPr lang="en-US" dirty="0" err="1"/>
-              <a:t>Tahapan</a:t>
-            </a:r>
-            <a:endParaRPr dirty="0"/>
-          </a:p>
-        </p:txBody>
-      </p:sp>
-      <p:sp>
-        <p:nvSpPr>
           <p:cNvPr id="13" name="Rectangle 2">
             <a:extLst>
               <a:ext uri="{FF2B5EF4-FFF2-40B4-BE49-F238E27FC236}">
@@ -15633,7 +16095,7 @@
         </p:nvSpPr>
         <p:spPr bwMode="auto">
           <a:xfrm>
-            <a:off x="327779" y="1192030"/>
+            <a:off x="469242" y="452305"/>
             <a:ext cx="8195909" cy="1200329"/>
           </a:xfrm>
           <a:prstGeom prst="rect">
@@ -15693,28 +16155,17 @@
             </a:r>
             <a:r>
               <a:rPr lang="en-ID" sz="2400" dirty="0" err="1"/>
-              <a:t>Konversi</a:t>
+              <a:t>Ekstraksi</a:t>
             </a:r>
             <a:r>
               <a:rPr lang="en-ID" sz="2400" dirty="0"/>
-              <a:t> Citra </a:t>
+              <a:t> Fitur </a:t>
             </a:r>
             <a:r>
               <a:rPr lang="en-ID" sz="2400" dirty="0" err="1"/>
-              <a:t>Berwarna</a:t>
-            </a:r>
-            <a:r>
-              <a:rPr lang="en-ID" sz="2400" dirty="0"/>
-              <a:t> </a:t>
-            </a:r>
-            <a:r>
-              <a:rPr lang="en-ID" sz="2400" dirty="0" err="1"/>
-              <a:t>ke</a:t>
-            </a:r>
-            <a:r>
-              <a:rPr lang="en-ID" sz="2400" dirty="0"/>
-              <a:t> Grayscale</a:t>
-            </a:r>
+              <a:t>Tekstur</a:t>
+            </a:r>
+            <a:endParaRPr lang="en-ID" sz="2400" dirty="0"/>
           </a:p>
           <a:p>
             <a:pPr marL="495300" indent="-342900">
@@ -15750,8 +16201,8 @@
         </p:blipFill>
         <p:spPr>
           <a:xfrm>
-            <a:off x="435995" y="1851155"/>
-            <a:ext cx="5529237" cy="2355936"/>
+            <a:off x="469242" y="1698800"/>
+            <a:ext cx="5774957" cy="2460634"/>
           </a:xfrm>
           <a:prstGeom prst="rect">
             <a:avLst/>
@@ -15780,7 +16231,7 @@
         </p:blipFill>
         <p:spPr>
           <a:xfrm>
-            <a:off x="6082203" y="2052674"/>
+            <a:off x="6181312" y="2468252"/>
             <a:ext cx="2962688" cy="1952898"/>
           </a:xfrm>
           <a:prstGeom prst="rect">
@@ -15788,6 +16239,516 @@
           </a:prstGeom>
         </p:spPr>
       </p:pic>
+      <p:sp>
+        <p:nvSpPr>
+          <p:cNvPr id="2" name="Rectangle 2">
+            <a:extLst>
+              <a:ext uri="{FF2B5EF4-FFF2-40B4-BE49-F238E27FC236}">
+                <a16:creationId xmlns:a16="http://schemas.microsoft.com/office/drawing/2014/main" id="{894CE3C5-DE55-B241-A14C-8286DC5EE7DC}"/>
+              </a:ext>
+            </a:extLst>
+          </p:cNvPr>
+          <p:cNvSpPr txBox="1">
+            <a:spLocks noChangeArrowheads="1"/>
+          </p:cNvSpPr>
+          <p:nvPr/>
+        </p:nvSpPr>
+        <p:spPr bwMode="auto">
+          <a:xfrm>
+            <a:off x="923200" y="1052469"/>
+            <a:ext cx="7588622" cy="646331"/>
+          </a:xfrm>
+          <a:prstGeom prst="rect">
+            <a:avLst/>
+          </a:prstGeom>
+          <a:noFill/>
+          <a:ln>
+            <a:noFill/>
+          </a:ln>
+          <a:effectLst/>
+          <a:extLst>
+            <a:ext uri="{909E8E84-426E-40DD-AFC4-6F175D3DCCD1}">
+              <a14:hiddenFill xmlns:a14="http://schemas.microsoft.com/office/drawing/2010/main">
+                <a:solidFill>
+                  <a:schemeClr val="accent1"/>
+                </a:solidFill>
+              </a14:hiddenFill>
+            </a:ext>
+            <a:ext uri="{91240B29-F687-4F45-9708-019B960494DF}">
+              <a14:hiddenLine xmlns:a14="http://schemas.microsoft.com/office/drawing/2010/main" w="9525">
+                <a:solidFill>
+                  <a:schemeClr val="tx1"/>
+                </a:solidFill>
+                <a:miter lim="800000"/>
+                <a:headEnd/>
+                <a:tailEnd/>
+              </a14:hiddenLine>
+            </a:ext>
+            <a:ext uri="{AF507438-7753-43E0-B8FC-AC1667EBCBE1}">
+              <a14:hiddenEffects xmlns:a14="http://schemas.microsoft.com/office/drawing/2010/main">
+                <a:effectLst>
+                  <a:outerShdw dist="35921" dir="2700000" algn="ctr" rotWithShape="0">
+                    <a:schemeClr val="bg2"/>
+                  </a:outerShdw>
+                </a:effectLst>
+              </a14:hiddenEffects>
+            </a:ext>
+          </a:extLst>
+        </p:spPr>
+        <p:txBody>
+          <a:bodyPr spcFirstLastPara="1" vert="horz" wrap="square" lIns="91440" tIns="45720" rIns="91440" bIns="45720" numCol="1" anchor="ctr" anchorCtr="0" compatLnSpc="1">
+            <a:prstTxWarp prst="textNoShape">
+              <a:avLst/>
+            </a:prstTxWarp>
+            <a:spAutoFit/>
+          </a:bodyPr>
+          <a:lstStyle>
+            <a:defPPr marR="0" lvl="0" algn="l" rtl="0">
+              <a:lnSpc>
+                <a:spcPct val="100000"/>
+              </a:lnSpc>
+              <a:spcBef>
+                <a:spcPts val="0"/>
+              </a:spcBef>
+              <a:spcAft>
+                <a:spcPts val="0"/>
+              </a:spcAft>
+            </a:defPPr>
+            <a:lvl1pPr marL="457200" marR="0" lvl="0" indent="-304800" algn="l" rtl="0">
+              <a:lnSpc>
+                <a:spcPct val="100000"/>
+              </a:lnSpc>
+              <a:spcBef>
+                <a:spcPts val="0"/>
+              </a:spcBef>
+              <a:spcAft>
+                <a:spcPts val="0"/>
+              </a:spcAft>
+              <a:buClr>
+                <a:schemeClr val="dk1"/>
+              </a:buClr>
+              <a:buSzPts val="1200"/>
+              <a:buFont typeface="Arimo"/>
+              <a:buNone/>
+              <a:defRPr sz="1200" b="0" i="0" u="none" strike="noStrike" cap="none">
+                <a:solidFill>
+                  <a:schemeClr val="dk1"/>
+                </a:solidFill>
+                <a:latin typeface="Arimo"/>
+                <a:ea typeface="Arimo"/>
+                <a:cs typeface="Arimo"/>
+                <a:sym typeface="Arimo"/>
+              </a:defRPr>
+            </a:lvl1pPr>
+            <a:lvl2pPr marL="914400" marR="0" lvl="1" indent="-304800" algn="ctr" rtl="0">
+              <a:lnSpc>
+                <a:spcPct val="100000"/>
+              </a:lnSpc>
+              <a:spcBef>
+                <a:spcPts val="0"/>
+              </a:spcBef>
+              <a:spcAft>
+                <a:spcPts val="0"/>
+              </a:spcAft>
+              <a:buClr>
+                <a:schemeClr val="dk1"/>
+              </a:buClr>
+              <a:buSzPts val="1200"/>
+              <a:buFont typeface="Arimo"/>
+              <a:buNone/>
+              <a:defRPr sz="1200" b="0" i="0" u="none" strike="noStrike" cap="none">
+                <a:solidFill>
+                  <a:schemeClr val="dk1"/>
+                </a:solidFill>
+                <a:latin typeface="Arimo"/>
+                <a:ea typeface="Arimo"/>
+                <a:cs typeface="Arimo"/>
+                <a:sym typeface="Arimo"/>
+              </a:defRPr>
+            </a:lvl2pPr>
+            <a:lvl3pPr marL="1371600" marR="0" lvl="2" indent="-304800" algn="ctr" rtl="0">
+              <a:lnSpc>
+                <a:spcPct val="100000"/>
+              </a:lnSpc>
+              <a:spcBef>
+                <a:spcPts val="0"/>
+              </a:spcBef>
+              <a:spcAft>
+                <a:spcPts val="0"/>
+              </a:spcAft>
+              <a:buClr>
+                <a:schemeClr val="dk1"/>
+              </a:buClr>
+              <a:buSzPts val="1200"/>
+              <a:buFont typeface="Arimo"/>
+              <a:buNone/>
+              <a:defRPr sz="1200" b="0" i="0" u="none" strike="noStrike" cap="none">
+                <a:solidFill>
+                  <a:schemeClr val="dk1"/>
+                </a:solidFill>
+                <a:latin typeface="Arimo"/>
+                <a:ea typeface="Arimo"/>
+                <a:cs typeface="Arimo"/>
+                <a:sym typeface="Arimo"/>
+              </a:defRPr>
+            </a:lvl3pPr>
+            <a:lvl4pPr marL="1828800" marR="0" lvl="3" indent="-304800" algn="ctr" rtl="0">
+              <a:lnSpc>
+                <a:spcPct val="100000"/>
+              </a:lnSpc>
+              <a:spcBef>
+                <a:spcPts val="0"/>
+              </a:spcBef>
+              <a:spcAft>
+                <a:spcPts val="0"/>
+              </a:spcAft>
+              <a:buClr>
+                <a:schemeClr val="dk1"/>
+              </a:buClr>
+              <a:buSzPts val="1200"/>
+              <a:buFont typeface="Arimo"/>
+              <a:buNone/>
+              <a:defRPr sz="1200" b="0" i="0" u="none" strike="noStrike" cap="none">
+                <a:solidFill>
+                  <a:schemeClr val="dk1"/>
+                </a:solidFill>
+                <a:latin typeface="Arimo"/>
+                <a:ea typeface="Arimo"/>
+                <a:cs typeface="Arimo"/>
+                <a:sym typeface="Arimo"/>
+              </a:defRPr>
+            </a:lvl4pPr>
+            <a:lvl5pPr marL="2286000" marR="0" lvl="4" indent="-304800" algn="ctr" rtl="0">
+              <a:lnSpc>
+                <a:spcPct val="100000"/>
+              </a:lnSpc>
+              <a:spcBef>
+                <a:spcPts val="0"/>
+              </a:spcBef>
+              <a:spcAft>
+                <a:spcPts val="0"/>
+              </a:spcAft>
+              <a:buClr>
+                <a:schemeClr val="dk1"/>
+              </a:buClr>
+              <a:buSzPts val="1200"/>
+              <a:buFont typeface="Arimo"/>
+              <a:buNone/>
+              <a:defRPr sz="1200" b="0" i="0" u="none" strike="noStrike" cap="none">
+                <a:solidFill>
+                  <a:schemeClr val="dk1"/>
+                </a:solidFill>
+                <a:latin typeface="Arimo"/>
+                <a:ea typeface="Arimo"/>
+                <a:cs typeface="Arimo"/>
+                <a:sym typeface="Arimo"/>
+              </a:defRPr>
+            </a:lvl5pPr>
+            <a:lvl6pPr marL="2743200" marR="0" lvl="5" indent="-304800" algn="ctr" rtl="0">
+              <a:lnSpc>
+                <a:spcPct val="100000"/>
+              </a:lnSpc>
+              <a:spcBef>
+                <a:spcPts val="0"/>
+              </a:spcBef>
+              <a:spcAft>
+                <a:spcPts val="0"/>
+              </a:spcAft>
+              <a:buClr>
+                <a:schemeClr val="dk1"/>
+              </a:buClr>
+              <a:buSzPts val="1200"/>
+              <a:buFont typeface="Arimo"/>
+              <a:buNone/>
+              <a:defRPr sz="1200" b="0" i="0" u="none" strike="noStrike" cap="none">
+                <a:solidFill>
+                  <a:schemeClr val="dk1"/>
+                </a:solidFill>
+                <a:latin typeface="Arimo"/>
+                <a:ea typeface="Arimo"/>
+                <a:cs typeface="Arimo"/>
+                <a:sym typeface="Arimo"/>
+              </a:defRPr>
+            </a:lvl6pPr>
+            <a:lvl7pPr marL="3200400" marR="0" lvl="6" indent="-304800" algn="ctr" rtl="0">
+              <a:lnSpc>
+                <a:spcPct val="100000"/>
+              </a:lnSpc>
+              <a:spcBef>
+                <a:spcPts val="0"/>
+              </a:spcBef>
+              <a:spcAft>
+                <a:spcPts val="0"/>
+              </a:spcAft>
+              <a:buClr>
+                <a:schemeClr val="dk1"/>
+              </a:buClr>
+              <a:buSzPts val="1200"/>
+              <a:buFont typeface="Arimo"/>
+              <a:buNone/>
+              <a:defRPr sz="1200" b="0" i="0" u="none" strike="noStrike" cap="none">
+                <a:solidFill>
+                  <a:schemeClr val="dk1"/>
+                </a:solidFill>
+                <a:latin typeface="Arimo"/>
+                <a:ea typeface="Arimo"/>
+                <a:cs typeface="Arimo"/>
+                <a:sym typeface="Arimo"/>
+              </a:defRPr>
+            </a:lvl7pPr>
+            <a:lvl8pPr marL="3657600" marR="0" lvl="7" indent="-304800" algn="ctr" rtl="0">
+              <a:lnSpc>
+                <a:spcPct val="100000"/>
+              </a:lnSpc>
+              <a:spcBef>
+                <a:spcPts val="0"/>
+              </a:spcBef>
+              <a:spcAft>
+                <a:spcPts val="0"/>
+              </a:spcAft>
+              <a:buClr>
+                <a:schemeClr val="dk1"/>
+              </a:buClr>
+              <a:buSzPts val="1200"/>
+              <a:buFont typeface="Arimo"/>
+              <a:buNone/>
+              <a:defRPr sz="1200" b="0" i="0" u="none" strike="noStrike" cap="none">
+                <a:solidFill>
+                  <a:schemeClr val="dk1"/>
+                </a:solidFill>
+                <a:latin typeface="Arimo"/>
+                <a:ea typeface="Arimo"/>
+                <a:cs typeface="Arimo"/>
+                <a:sym typeface="Arimo"/>
+              </a:defRPr>
+            </a:lvl8pPr>
+            <a:lvl9pPr marL="4114800" marR="0" lvl="8" indent="-304800" algn="ctr" rtl="0">
+              <a:lnSpc>
+                <a:spcPct val="100000"/>
+              </a:lnSpc>
+              <a:spcBef>
+                <a:spcPts val="0"/>
+              </a:spcBef>
+              <a:spcAft>
+                <a:spcPts val="0"/>
+              </a:spcAft>
+              <a:buClr>
+                <a:schemeClr val="dk1"/>
+              </a:buClr>
+              <a:buSzPts val="1200"/>
+              <a:buFont typeface="Arimo"/>
+              <a:buNone/>
+              <a:defRPr sz="1200" b="0" i="0" u="none" strike="noStrike" cap="none">
+                <a:solidFill>
+                  <a:schemeClr val="dk1"/>
+                </a:solidFill>
+                <a:latin typeface="Arimo"/>
+                <a:ea typeface="Arimo"/>
+                <a:cs typeface="Arimo"/>
+                <a:sym typeface="Arimo"/>
+              </a:defRPr>
+            </a:lvl9pPr>
+          </a:lstStyle>
+          <a:p>
+            <a:pPr marL="0" indent="0" eaLnBrk="0" fontAlgn="base" hangingPunct="0">
+              <a:spcBef>
+                <a:spcPct val="0"/>
+              </a:spcBef>
+              <a:spcAft>
+                <a:spcPct val="0"/>
+              </a:spcAft>
+              <a:buClrTx/>
+              <a:buSzTx/>
+            </a:pPr>
+            <a:r>
+              <a:rPr lang="en-ID" dirty="0"/>
+              <a:t>Pada </a:t>
+            </a:r>
+            <a:r>
+              <a:rPr lang="en-ID" dirty="0" err="1"/>
+              <a:t>tahap</a:t>
+            </a:r>
+            <a:r>
+              <a:rPr lang="en-ID" dirty="0"/>
+              <a:t> </a:t>
+            </a:r>
+            <a:r>
+              <a:rPr lang="en-ID" dirty="0" err="1"/>
+              <a:t>ini</a:t>
+            </a:r>
+            <a:r>
+              <a:rPr lang="en-ID" dirty="0"/>
+              <a:t>, </a:t>
+            </a:r>
+            <a:r>
+              <a:rPr lang="en-ID" dirty="0" err="1"/>
+              <a:t>dilakukan</a:t>
+            </a:r>
+            <a:r>
+              <a:rPr lang="en-ID" dirty="0"/>
+              <a:t> </a:t>
+            </a:r>
+            <a:r>
+              <a:rPr lang="en-ID" dirty="0" err="1"/>
+              <a:t>ekstraksi</a:t>
+            </a:r>
+            <a:r>
+              <a:rPr lang="en-ID" dirty="0"/>
+              <a:t> </a:t>
+            </a:r>
+            <a:r>
+              <a:rPr lang="en-ID" dirty="0" err="1"/>
+              <a:t>fitur</a:t>
+            </a:r>
+            <a:r>
+              <a:rPr lang="en-ID" dirty="0"/>
+              <a:t> </a:t>
+            </a:r>
+            <a:r>
+              <a:rPr lang="en-ID" dirty="0" err="1"/>
+              <a:t>tekstur</a:t>
+            </a:r>
+            <a:r>
+              <a:rPr lang="en-ID" dirty="0"/>
+              <a:t> pada 10 </a:t>
+            </a:r>
+            <a:r>
+              <a:rPr lang="en-ID" dirty="0" err="1"/>
+              <a:t>citra</a:t>
+            </a:r>
+            <a:r>
+              <a:rPr lang="en-ID" dirty="0"/>
+              <a:t> </a:t>
+            </a:r>
+            <a:r>
+              <a:rPr lang="en-ID" dirty="0" err="1"/>
+              <a:t>menggunakan</a:t>
+            </a:r>
+            <a:r>
+              <a:rPr lang="en-ID" dirty="0"/>
+              <a:t> </a:t>
+            </a:r>
+            <a:r>
+              <a:rPr lang="en-ID" dirty="0" err="1"/>
+              <a:t>metode</a:t>
+            </a:r>
+            <a:r>
+              <a:rPr lang="en-ID" dirty="0"/>
+              <a:t> GLCM (Gray Level Co-Occurrence Matrix). Proses </a:t>
+            </a:r>
+            <a:r>
+              <a:rPr lang="en-ID" dirty="0" err="1"/>
+              <a:t>ini</a:t>
+            </a:r>
+            <a:r>
+              <a:rPr lang="en-ID" dirty="0"/>
+              <a:t> </a:t>
+            </a:r>
+            <a:r>
+              <a:rPr lang="en-ID" dirty="0" err="1"/>
+              <a:t>bertujuan</a:t>
+            </a:r>
+            <a:r>
+              <a:rPr lang="en-ID" dirty="0"/>
+              <a:t> </a:t>
+            </a:r>
+            <a:r>
+              <a:rPr lang="en-ID" dirty="0" err="1"/>
+              <a:t>untuk</a:t>
+            </a:r>
+            <a:r>
+              <a:rPr lang="en-ID" dirty="0"/>
+              <a:t> </a:t>
+            </a:r>
+            <a:r>
+              <a:rPr lang="en-ID" dirty="0" err="1"/>
+              <a:t>mengambil</a:t>
+            </a:r>
+            <a:r>
+              <a:rPr lang="en-ID" dirty="0"/>
+              <a:t> </a:t>
+            </a:r>
+            <a:r>
+              <a:rPr lang="en-ID" dirty="0" err="1"/>
+              <a:t>informasi</a:t>
+            </a:r>
+            <a:r>
+              <a:rPr lang="en-ID" dirty="0"/>
+              <a:t> </a:t>
+            </a:r>
+            <a:r>
+              <a:rPr lang="en-ID" dirty="0" err="1"/>
+              <a:t>pola</a:t>
+            </a:r>
+            <a:r>
+              <a:rPr lang="en-ID" dirty="0"/>
+              <a:t> </a:t>
+            </a:r>
+            <a:r>
+              <a:rPr lang="en-ID" dirty="0" err="1"/>
+              <a:t>tekstur</a:t>
+            </a:r>
+            <a:r>
+              <a:rPr lang="en-ID" dirty="0"/>
+              <a:t> </a:t>
+            </a:r>
+            <a:r>
+              <a:rPr lang="en-ID" dirty="0" err="1"/>
+              <a:t>dari</a:t>
+            </a:r>
+            <a:r>
+              <a:rPr lang="en-ID" dirty="0"/>
+              <a:t> </a:t>
+            </a:r>
+            <a:r>
+              <a:rPr lang="en-ID" dirty="0" err="1"/>
+              <a:t>setiap</a:t>
+            </a:r>
+            <a:r>
+              <a:rPr lang="en-ID" dirty="0"/>
+              <a:t> </a:t>
+            </a:r>
+            <a:r>
+              <a:rPr lang="en-ID" dirty="0" err="1"/>
+              <a:t>citra</a:t>
+            </a:r>
+            <a:r>
+              <a:rPr lang="en-ID" dirty="0"/>
+              <a:t> yang </a:t>
+            </a:r>
+            <a:r>
+              <a:rPr lang="en-ID" dirty="0" err="1"/>
+              <a:t>telah</a:t>
+            </a:r>
+            <a:r>
+              <a:rPr lang="en-ID" dirty="0"/>
+              <a:t> </a:t>
+            </a:r>
+            <a:r>
+              <a:rPr lang="en-ID" dirty="0" err="1"/>
+              <a:t>diubah</a:t>
+            </a:r>
+            <a:r>
+              <a:rPr lang="en-ID" dirty="0"/>
+              <a:t> </a:t>
+            </a:r>
+            <a:r>
+              <a:rPr lang="en-ID" dirty="0" err="1"/>
+              <a:t>menjadi</a:t>
+            </a:r>
+            <a:r>
+              <a:rPr lang="en-ID" dirty="0"/>
+              <a:t> grayscale.</a:t>
+            </a:r>
+            <a:endParaRPr lang="en-US" altLang="en-US" dirty="0">
+              <a:solidFill>
+                <a:schemeClr val="tx1"/>
+              </a:solidFill>
+              <a:latin typeface="Arial" panose="020B0604020202020204" pitchFamily="34" charset="0"/>
+            </a:endParaRPr>
+          </a:p>
+        </p:txBody>
+      </p:sp>
     </p:spTree>
     <p:extLst>
       <p:ext uri="{BB962C8B-B14F-4D97-AF65-F5344CB8AC3E}">
@@ -15826,54 +16787,6 @@
       </p:grpSpPr>
       <p:sp>
         <p:nvSpPr>
-          <p:cNvPr id="395" name="Google Shape;395;p36">
-            <a:extLst>
-              <a:ext uri="{FF2B5EF4-FFF2-40B4-BE49-F238E27FC236}">
-                <a16:creationId xmlns:a16="http://schemas.microsoft.com/office/drawing/2014/main" id="{E8C7B40F-8E39-78CF-1A47-47A4B017AF52}"/>
-              </a:ext>
-            </a:extLst>
-          </p:cNvPr>
-          <p:cNvSpPr txBox="1">
-            <a:spLocks noGrp="1"/>
-          </p:cNvSpPr>
-          <p:nvPr>
-            <p:ph type="title"/>
-          </p:nvPr>
-        </p:nvSpPr>
-        <p:spPr>
-          <a:xfrm>
-            <a:off x="965954" y="619330"/>
-            <a:ext cx="7704000" cy="572700"/>
-          </a:xfrm>
-          <a:prstGeom prst="rect">
-            <a:avLst/>
-          </a:prstGeom>
-        </p:spPr>
-        <p:txBody>
-          <a:bodyPr spcFirstLastPara="1" wrap="square" lIns="91425" tIns="91425" rIns="91425" bIns="91425" anchor="t" anchorCtr="0">
-            <a:noAutofit/>
-          </a:bodyPr>
-          <a:lstStyle/>
-          <a:p>
-            <a:pPr marL="0" lvl="0" indent="0" algn="l" rtl="0">
-              <a:spcBef>
-                <a:spcPts val="0"/>
-              </a:spcBef>
-              <a:spcAft>
-                <a:spcPts val="0"/>
-              </a:spcAft>
-              <a:buNone/>
-            </a:pPr>
-            <a:r>
-              <a:rPr lang="en-US" dirty="0" err="1"/>
-              <a:t>Tahapan</a:t>
-            </a:r>
-            <a:endParaRPr dirty="0"/>
-          </a:p>
-        </p:txBody>
-      </p:sp>
-      <p:sp>
-        <p:nvSpPr>
           <p:cNvPr id="13" name="Rectangle 2">
             <a:extLst>
               <a:ext uri="{FF2B5EF4-FFF2-40B4-BE49-F238E27FC236}">
@@ -15890,7 +16803,7 @@
         </p:nvSpPr>
         <p:spPr bwMode="auto">
           <a:xfrm>
-            <a:off x="965954" y="995664"/>
+            <a:off x="948091" y="544109"/>
             <a:ext cx="8195909" cy="1200329"/>
           </a:xfrm>
           <a:prstGeom prst="rect">
@@ -15979,10 +16892,10 @@
       </p:sp>
       <p:pic>
         <p:nvPicPr>
-          <p:cNvPr id="3" name="Picture 2">
+          <p:cNvPr id="4" name="Picture 3">
             <a:extLst>
               <a:ext uri="{FF2B5EF4-FFF2-40B4-BE49-F238E27FC236}">
-                <a16:creationId xmlns:a16="http://schemas.microsoft.com/office/drawing/2014/main" id="{6703978D-F0AF-26E6-2A2E-93ACBA7B9307}"/>
+                <a16:creationId xmlns:a16="http://schemas.microsoft.com/office/drawing/2014/main" id="{D5D9934A-F2E3-F52B-6E9B-8F73CF7580CD}"/>
               </a:ext>
             </a:extLst>
           </p:cNvPr>
@@ -15999,14 +16912,452 @@
         </p:blipFill>
         <p:spPr>
           <a:xfrm>
-            <a:off x="2161854" y="1577127"/>
-            <a:ext cx="5200971" cy="2740761"/>
+            <a:off x="2578332" y="1854990"/>
+            <a:ext cx="4753422" cy="2626611"/>
           </a:xfrm>
           <a:prstGeom prst="rect">
             <a:avLst/>
           </a:prstGeom>
         </p:spPr>
       </p:pic>
+      <p:sp>
+        <p:nvSpPr>
+          <p:cNvPr id="5" name="Rectangle 2">
+            <a:extLst>
+              <a:ext uri="{FF2B5EF4-FFF2-40B4-BE49-F238E27FC236}">
+                <a16:creationId xmlns:a16="http://schemas.microsoft.com/office/drawing/2014/main" id="{247BE1FB-728B-9633-F52D-8FC7DAD2A5C6}"/>
+              </a:ext>
+            </a:extLst>
+          </p:cNvPr>
+          <p:cNvSpPr txBox="1">
+            <a:spLocks noChangeArrowheads="1"/>
+          </p:cNvSpPr>
+          <p:nvPr/>
+        </p:nvSpPr>
+        <p:spPr bwMode="auto">
+          <a:xfrm>
+            <a:off x="1397333" y="1144273"/>
+            <a:ext cx="7633777" cy="461665"/>
+          </a:xfrm>
+          <a:prstGeom prst="rect">
+            <a:avLst/>
+          </a:prstGeom>
+          <a:noFill/>
+          <a:ln>
+            <a:noFill/>
+          </a:ln>
+          <a:effectLst/>
+          <a:extLst>
+            <a:ext uri="{909E8E84-426E-40DD-AFC4-6F175D3DCCD1}">
+              <a14:hiddenFill xmlns:a14="http://schemas.microsoft.com/office/drawing/2010/main">
+                <a:solidFill>
+                  <a:schemeClr val="accent1"/>
+                </a:solidFill>
+              </a14:hiddenFill>
+            </a:ext>
+            <a:ext uri="{91240B29-F687-4F45-9708-019B960494DF}">
+              <a14:hiddenLine xmlns:a14="http://schemas.microsoft.com/office/drawing/2010/main" w="9525">
+                <a:solidFill>
+                  <a:schemeClr val="tx1"/>
+                </a:solidFill>
+                <a:miter lim="800000"/>
+                <a:headEnd/>
+                <a:tailEnd/>
+              </a14:hiddenLine>
+            </a:ext>
+            <a:ext uri="{AF507438-7753-43E0-B8FC-AC1667EBCBE1}">
+              <a14:hiddenEffects xmlns:a14="http://schemas.microsoft.com/office/drawing/2010/main">
+                <a:effectLst>
+                  <a:outerShdw dist="35921" dir="2700000" algn="ctr" rotWithShape="0">
+                    <a:schemeClr val="bg2"/>
+                  </a:outerShdw>
+                </a:effectLst>
+              </a14:hiddenEffects>
+            </a:ext>
+          </a:extLst>
+        </p:spPr>
+        <p:txBody>
+          <a:bodyPr spcFirstLastPara="1" vert="horz" wrap="square" lIns="91440" tIns="45720" rIns="91440" bIns="45720" numCol="1" anchor="ctr" anchorCtr="0" compatLnSpc="1">
+            <a:prstTxWarp prst="textNoShape">
+              <a:avLst/>
+            </a:prstTxWarp>
+            <a:spAutoFit/>
+          </a:bodyPr>
+          <a:lstStyle>
+            <a:defPPr marR="0" lvl="0" algn="l" rtl="0">
+              <a:lnSpc>
+                <a:spcPct val="100000"/>
+              </a:lnSpc>
+              <a:spcBef>
+                <a:spcPts val="0"/>
+              </a:spcBef>
+              <a:spcAft>
+                <a:spcPts val="0"/>
+              </a:spcAft>
+            </a:defPPr>
+            <a:lvl1pPr marL="457200" marR="0" lvl="0" indent="-304800" algn="l" rtl="0">
+              <a:lnSpc>
+                <a:spcPct val="100000"/>
+              </a:lnSpc>
+              <a:spcBef>
+                <a:spcPts val="0"/>
+              </a:spcBef>
+              <a:spcAft>
+                <a:spcPts val="0"/>
+              </a:spcAft>
+              <a:buClr>
+                <a:schemeClr val="dk1"/>
+              </a:buClr>
+              <a:buSzPts val="1200"/>
+              <a:buFont typeface="Arimo"/>
+              <a:buNone/>
+              <a:defRPr sz="1200" b="0" i="0" u="none" strike="noStrike" cap="none">
+                <a:solidFill>
+                  <a:schemeClr val="dk1"/>
+                </a:solidFill>
+                <a:latin typeface="Arimo"/>
+                <a:ea typeface="Arimo"/>
+                <a:cs typeface="Arimo"/>
+                <a:sym typeface="Arimo"/>
+              </a:defRPr>
+            </a:lvl1pPr>
+            <a:lvl2pPr marL="914400" marR="0" lvl="1" indent="-304800" algn="ctr" rtl="0">
+              <a:lnSpc>
+                <a:spcPct val="100000"/>
+              </a:lnSpc>
+              <a:spcBef>
+                <a:spcPts val="0"/>
+              </a:spcBef>
+              <a:spcAft>
+                <a:spcPts val="0"/>
+              </a:spcAft>
+              <a:buClr>
+                <a:schemeClr val="dk1"/>
+              </a:buClr>
+              <a:buSzPts val="1200"/>
+              <a:buFont typeface="Arimo"/>
+              <a:buNone/>
+              <a:defRPr sz="1200" b="0" i="0" u="none" strike="noStrike" cap="none">
+                <a:solidFill>
+                  <a:schemeClr val="dk1"/>
+                </a:solidFill>
+                <a:latin typeface="Arimo"/>
+                <a:ea typeface="Arimo"/>
+                <a:cs typeface="Arimo"/>
+                <a:sym typeface="Arimo"/>
+              </a:defRPr>
+            </a:lvl2pPr>
+            <a:lvl3pPr marL="1371600" marR="0" lvl="2" indent="-304800" algn="ctr" rtl="0">
+              <a:lnSpc>
+                <a:spcPct val="100000"/>
+              </a:lnSpc>
+              <a:spcBef>
+                <a:spcPts val="0"/>
+              </a:spcBef>
+              <a:spcAft>
+                <a:spcPts val="0"/>
+              </a:spcAft>
+              <a:buClr>
+                <a:schemeClr val="dk1"/>
+              </a:buClr>
+              <a:buSzPts val="1200"/>
+              <a:buFont typeface="Arimo"/>
+              <a:buNone/>
+              <a:defRPr sz="1200" b="0" i="0" u="none" strike="noStrike" cap="none">
+                <a:solidFill>
+                  <a:schemeClr val="dk1"/>
+                </a:solidFill>
+                <a:latin typeface="Arimo"/>
+                <a:ea typeface="Arimo"/>
+                <a:cs typeface="Arimo"/>
+                <a:sym typeface="Arimo"/>
+              </a:defRPr>
+            </a:lvl3pPr>
+            <a:lvl4pPr marL="1828800" marR="0" lvl="3" indent="-304800" algn="ctr" rtl="0">
+              <a:lnSpc>
+                <a:spcPct val="100000"/>
+              </a:lnSpc>
+              <a:spcBef>
+                <a:spcPts val="0"/>
+              </a:spcBef>
+              <a:spcAft>
+                <a:spcPts val="0"/>
+              </a:spcAft>
+              <a:buClr>
+                <a:schemeClr val="dk1"/>
+              </a:buClr>
+              <a:buSzPts val="1200"/>
+              <a:buFont typeface="Arimo"/>
+              <a:buNone/>
+              <a:defRPr sz="1200" b="0" i="0" u="none" strike="noStrike" cap="none">
+                <a:solidFill>
+                  <a:schemeClr val="dk1"/>
+                </a:solidFill>
+                <a:latin typeface="Arimo"/>
+                <a:ea typeface="Arimo"/>
+                <a:cs typeface="Arimo"/>
+                <a:sym typeface="Arimo"/>
+              </a:defRPr>
+            </a:lvl4pPr>
+            <a:lvl5pPr marL="2286000" marR="0" lvl="4" indent="-304800" algn="ctr" rtl="0">
+              <a:lnSpc>
+                <a:spcPct val="100000"/>
+              </a:lnSpc>
+              <a:spcBef>
+                <a:spcPts val="0"/>
+              </a:spcBef>
+              <a:spcAft>
+                <a:spcPts val="0"/>
+              </a:spcAft>
+              <a:buClr>
+                <a:schemeClr val="dk1"/>
+              </a:buClr>
+              <a:buSzPts val="1200"/>
+              <a:buFont typeface="Arimo"/>
+              <a:buNone/>
+              <a:defRPr sz="1200" b="0" i="0" u="none" strike="noStrike" cap="none">
+                <a:solidFill>
+                  <a:schemeClr val="dk1"/>
+                </a:solidFill>
+                <a:latin typeface="Arimo"/>
+                <a:ea typeface="Arimo"/>
+                <a:cs typeface="Arimo"/>
+                <a:sym typeface="Arimo"/>
+              </a:defRPr>
+            </a:lvl5pPr>
+            <a:lvl6pPr marL="2743200" marR="0" lvl="5" indent="-304800" algn="ctr" rtl="0">
+              <a:lnSpc>
+                <a:spcPct val="100000"/>
+              </a:lnSpc>
+              <a:spcBef>
+                <a:spcPts val="0"/>
+              </a:spcBef>
+              <a:spcAft>
+                <a:spcPts val="0"/>
+              </a:spcAft>
+              <a:buClr>
+                <a:schemeClr val="dk1"/>
+              </a:buClr>
+              <a:buSzPts val="1200"/>
+              <a:buFont typeface="Arimo"/>
+              <a:buNone/>
+              <a:defRPr sz="1200" b="0" i="0" u="none" strike="noStrike" cap="none">
+                <a:solidFill>
+                  <a:schemeClr val="dk1"/>
+                </a:solidFill>
+                <a:latin typeface="Arimo"/>
+                <a:ea typeface="Arimo"/>
+                <a:cs typeface="Arimo"/>
+                <a:sym typeface="Arimo"/>
+              </a:defRPr>
+            </a:lvl6pPr>
+            <a:lvl7pPr marL="3200400" marR="0" lvl="6" indent="-304800" algn="ctr" rtl="0">
+              <a:lnSpc>
+                <a:spcPct val="100000"/>
+              </a:lnSpc>
+              <a:spcBef>
+                <a:spcPts val="0"/>
+              </a:spcBef>
+              <a:spcAft>
+                <a:spcPts val="0"/>
+              </a:spcAft>
+              <a:buClr>
+                <a:schemeClr val="dk1"/>
+              </a:buClr>
+              <a:buSzPts val="1200"/>
+              <a:buFont typeface="Arimo"/>
+              <a:buNone/>
+              <a:defRPr sz="1200" b="0" i="0" u="none" strike="noStrike" cap="none">
+                <a:solidFill>
+                  <a:schemeClr val="dk1"/>
+                </a:solidFill>
+                <a:latin typeface="Arimo"/>
+                <a:ea typeface="Arimo"/>
+                <a:cs typeface="Arimo"/>
+                <a:sym typeface="Arimo"/>
+              </a:defRPr>
+            </a:lvl7pPr>
+            <a:lvl8pPr marL="3657600" marR="0" lvl="7" indent="-304800" algn="ctr" rtl="0">
+              <a:lnSpc>
+                <a:spcPct val="100000"/>
+              </a:lnSpc>
+              <a:spcBef>
+                <a:spcPts val="0"/>
+              </a:spcBef>
+              <a:spcAft>
+                <a:spcPts val="0"/>
+              </a:spcAft>
+              <a:buClr>
+                <a:schemeClr val="dk1"/>
+              </a:buClr>
+              <a:buSzPts val="1200"/>
+              <a:buFont typeface="Arimo"/>
+              <a:buNone/>
+              <a:defRPr sz="1200" b="0" i="0" u="none" strike="noStrike" cap="none">
+                <a:solidFill>
+                  <a:schemeClr val="dk1"/>
+                </a:solidFill>
+                <a:latin typeface="Arimo"/>
+                <a:ea typeface="Arimo"/>
+                <a:cs typeface="Arimo"/>
+                <a:sym typeface="Arimo"/>
+              </a:defRPr>
+            </a:lvl8pPr>
+            <a:lvl9pPr marL="4114800" marR="0" lvl="8" indent="-304800" algn="ctr" rtl="0">
+              <a:lnSpc>
+                <a:spcPct val="100000"/>
+              </a:lnSpc>
+              <a:spcBef>
+                <a:spcPts val="0"/>
+              </a:spcBef>
+              <a:spcAft>
+                <a:spcPts val="0"/>
+              </a:spcAft>
+              <a:buClr>
+                <a:schemeClr val="dk1"/>
+              </a:buClr>
+              <a:buSzPts val="1200"/>
+              <a:buFont typeface="Arimo"/>
+              <a:buNone/>
+              <a:defRPr sz="1200" b="0" i="0" u="none" strike="noStrike" cap="none">
+                <a:solidFill>
+                  <a:schemeClr val="dk1"/>
+                </a:solidFill>
+                <a:latin typeface="Arimo"/>
+                <a:ea typeface="Arimo"/>
+                <a:cs typeface="Arimo"/>
+                <a:sym typeface="Arimo"/>
+              </a:defRPr>
+            </a:lvl9pPr>
+          </a:lstStyle>
+          <a:p>
+            <a:pPr marL="0" indent="0" eaLnBrk="0" fontAlgn="base" hangingPunct="0">
+              <a:spcBef>
+                <a:spcPct val="0"/>
+              </a:spcBef>
+              <a:spcAft>
+                <a:spcPct val="0"/>
+              </a:spcAft>
+              <a:buClrTx/>
+              <a:buSzTx/>
+            </a:pPr>
+            <a:r>
+              <a:rPr lang="en-ID" dirty="0"/>
+              <a:t>Pada </a:t>
+            </a:r>
+            <a:r>
+              <a:rPr lang="en-ID" dirty="0" err="1"/>
+              <a:t>tahap</a:t>
+            </a:r>
+            <a:r>
+              <a:rPr lang="en-ID" dirty="0"/>
+              <a:t> </a:t>
+            </a:r>
+            <a:r>
+              <a:rPr lang="en-ID" dirty="0" err="1"/>
+              <a:t>ini</a:t>
+            </a:r>
+            <a:r>
+              <a:rPr lang="en-ID" dirty="0"/>
+              <a:t>, </a:t>
+            </a:r>
+            <a:r>
+              <a:rPr lang="en-ID" dirty="0" err="1"/>
+              <a:t>nilai-nilai</a:t>
+            </a:r>
+            <a:r>
+              <a:rPr lang="en-ID" dirty="0"/>
+              <a:t> </a:t>
+            </a:r>
+            <a:r>
+              <a:rPr lang="en-ID" dirty="0" err="1"/>
+              <a:t>fitur</a:t>
+            </a:r>
+            <a:r>
+              <a:rPr lang="en-ID" dirty="0"/>
+              <a:t> </a:t>
+            </a:r>
+            <a:r>
+              <a:rPr lang="en-ID" dirty="0" err="1"/>
+              <a:t>tekstur</a:t>
+            </a:r>
+            <a:r>
+              <a:rPr lang="en-ID" dirty="0"/>
+              <a:t> yang </a:t>
+            </a:r>
+            <a:r>
+              <a:rPr lang="en-ID" dirty="0" err="1"/>
+              <a:t>telah</a:t>
+            </a:r>
+            <a:r>
+              <a:rPr lang="en-ID" dirty="0"/>
+              <a:t> </a:t>
+            </a:r>
+            <a:r>
+              <a:rPr lang="en-ID" dirty="0" err="1"/>
+              <a:t>diperoleh</a:t>
+            </a:r>
+            <a:r>
+              <a:rPr lang="en-ID" dirty="0"/>
+              <a:t> </a:t>
+            </a:r>
+            <a:r>
+              <a:rPr lang="en-ID" dirty="0" err="1"/>
+              <a:t>dari</a:t>
+            </a:r>
+            <a:r>
+              <a:rPr lang="en-ID" dirty="0"/>
+              <a:t> proses </a:t>
+            </a:r>
+            <a:r>
+              <a:rPr lang="en-ID" dirty="0" err="1"/>
+              <a:t>ekstraksi</a:t>
+            </a:r>
+            <a:r>
+              <a:rPr lang="en-ID" dirty="0"/>
+              <a:t> (Energy, Contrast, Correlation, dan Homogeneity) </a:t>
+            </a:r>
+            <a:r>
+              <a:rPr lang="en-ID" dirty="0" err="1"/>
+              <a:t>disimpan</a:t>
+            </a:r>
+            <a:r>
+              <a:rPr lang="en-ID" dirty="0"/>
+              <a:t> </a:t>
+            </a:r>
+            <a:r>
+              <a:rPr lang="en-ID" dirty="0" err="1"/>
+              <a:t>ke</a:t>
+            </a:r>
+            <a:r>
+              <a:rPr lang="en-ID" dirty="0"/>
+              <a:t> </a:t>
+            </a:r>
+            <a:r>
+              <a:rPr lang="en-ID" dirty="0" err="1"/>
+              <a:t>dalam</a:t>
+            </a:r>
+            <a:r>
+              <a:rPr lang="en-ID" dirty="0"/>
+              <a:t> file Excel (.xlsx) </a:t>
+            </a:r>
+            <a:r>
+              <a:rPr lang="en-ID" dirty="0" err="1"/>
+              <a:t>menggunakan</a:t>
+            </a:r>
+            <a:r>
+              <a:rPr lang="en-ID" dirty="0"/>
+              <a:t> library Pandas.</a:t>
+            </a:r>
+            <a:endParaRPr lang="en-US" altLang="en-US" dirty="0">
+              <a:solidFill>
+                <a:schemeClr val="tx1"/>
+              </a:solidFill>
+              <a:latin typeface="Arial" panose="020B0604020202020204" pitchFamily="34" charset="0"/>
+            </a:endParaRPr>
+          </a:p>
+        </p:txBody>
+      </p:sp>
     </p:spTree>
     <p:extLst>
       <p:ext uri="{BB962C8B-B14F-4D97-AF65-F5344CB8AC3E}">
@@ -16241,6 +17592,24 @@
                 </a:solidFill>
                 <a:latin typeface="Arial" panose="020B0604020202020204" pitchFamily="34" charset="0"/>
               </a:rPr>
+              <a:t>coba</a:t>
+            </a:r>
+            <a:r>
+              <a:rPr lang="en-US" altLang="en-US" sz="2000" dirty="0">
+                <a:solidFill>
+                  <a:schemeClr val="tx1"/>
+                </a:solidFill>
+                <a:latin typeface="Arial" panose="020B0604020202020204" pitchFamily="34" charset="0"/>
+              </a:rPr>
+              <a:t> </a:t>
+            </a:r>
+            <a:r>
+              <a:rPr lang="en-US" altLang="en-US" sz="2000" dirty="0" err="1">
+                <a:solidFill>
+                  <a:schemeClr val="tx1"/>
+                </a:solidFill>
+                <a:latin typeface="Arial" panose="020B0604020202020204" pitchFamily="34" charset="0"/>
+              </a:rPr>
               <a:t>membandingkan</a:t>
             </a:r>
             <a:r>
@@ -16405,14 +17774,14 @@
               <a:buNone/>
             </a:pPr>
             <a:r>
-              <a:rPr lang="en-ID" dirty="0" err="1">
+              <a:rPr lang="en-ID" b="1" dirty="0" err="1">
                 <a:solidFill>
                   <a:schemeClr val="tx1"/>
                 </a:solidFill>
               </a:rPr>
               <a:t>Image_10.jpg</a:t>
             </a:r>
-            <a:endParaRPr lang="en-ID" dirty="0">
+            <a:endParaRPr lang="en-ID" b="1" dirty="0">
               <a:solidFill>
                 <a:schemeClr val="tx1"/>
               </a:solidFill>
@@ -16713,14 +18082,14 @@
               <a:buNone/>
             </a:pPr>
             <a:r>
-              <a:rPr lang="en-ID" dirty="0" err="1">
+              <a:rPr lang="en-ID" b="1" dirty="0" err="1">
                 <a:solidFill>
                   <a:schemeClr val="tx1"/>
                 </a:solidFill>
               </a:rPr>
               <a:t>Image_122.jpg</a:t>
             </a:r>
-            <a:endParaRPr lang="en-ID" dirty="0">
+            <a:endParaRPr lang="en-ID" b="1" dirty="0">
               <a:solidFill>
                 <a:schemeClr val="tx1"/>
               </a:solidFill>
